--- a/10-Knowledge-Products/KP1-GEA/videos/module_6/en/decks/KP1_M6_Deck_v0.1.pptx
+++ b/10-Knowledge-Products/KP1-GEA/videos/module_6/en/decks/KP1_M6_Deck_v0.1.pptx
@@ -1199,7 +1199,7 @@
           <a:lstStyle/>
           <a:p>
             <a:r>
-              <a:t>VO: Now the failures, because forewarned is forearmed. The team gets pulled onto the flagship project that is in trouble, and the architecture work stops. The minister or director-general who championed it moves on, and the successor has their own priorities. The governance board, under delivery pressure, lets one powerful project through, then another, until its no means nothing. And the funding, never secured as a multi-year commitment, quietly becomes an annual favour that one budget cycle removes. None of these is dramatic. Each is a slow fade, usually in the second year.</a:t>
+              <a:t>VO: Now the failures, because forewarned is forearmed. The team gets pulled onto the flagship project that is in trouble, and the architecture work stops. The minister or director-general who championed it moves on, and the successor has their own priorities. The governance board, under delivery pressure, lets one powerful project through, then another, until its "no" means nothing. And the funding, never secured as a multi-year commitment, quietly becomes an annual favour that one budget cycle removes. None of these is dramatic. Each is a slow fade, usually in the second year.</a:t>
             </a:r>
           </a:p>
           <a:p/>
@@ -1637,7 +1637,7 @@
           <a:lstStyle/>
           <a:p>
             <a:r>
-              <a:t>VO: Start with what stays the same, because it is most of it. The five phases — discover, assess, adapt, plan, execute and govern. The four sign-offs. The deliverables. The reuse-before-build default. The binding governance board. None of that is specific to education. It is the method. What changes when you move to another sector is only the contents: the institutions you map, and the kind of record at the centre of the fragmentation.</a:t>
+              <a:t>VO: Start with what stays the same, because it is most of it. The five phases — discover, assess, adapt, plan, execute and govern. The four sign-offs. The six deliverables. The reuse-before-build default. The binding governance board. None of that is specific to education. It is the method. What changes when you move to another sector is only the contents: the institutions you map, and the kind of record at the centre of the fragmentation.</a:t>
             </a:r>
           </a:p>
         </p:txBody>
@@ -1859,7 +1859,7 @@
           <a:p/>
           <a:p>
             <a:r>
-              <a:t>Production cue: the pivotal slide of this video. Hold it a beat longer.</a:t>
+              <a:t>Production cue: the pivotal slide of this video. Hold it a beat longer. On screen: bar length is the argument and carries no figures — the dark segments are the muscle built once; every later sector's bar is only its own architecture plus a sliver for consuming what exists.</a:t>
             </a:r>
           </a:p>
         </p:txBody>
@@ -3310,6 +3310,12 @@
               <a:t>VO: Wave one is one sector, done well. Pick the sector with a clear flagship the minister cares about — the single learner record, the single patient record. Run the full method there, end to end. But notice what wave one really builds: not just that sector's architecture, but the national foundations — the permanent team, the governance board, and the first shared platforms like identity and data exchange. Wave one looks like one sector. It is actually the foundation the whole rollout stands on.</a:t>
             </a:r>
           </a:p>
+          <a:p/>
+          <a:p>
+            <a:r>
+              <a:t>On screen: the sector block standing on a wider foundation block — reveal the base on 'but notice what wave one really builds'.</a:t>
+            </a:r>
+          </a:p>
         </p:txBody>
       </p:sp>
       <p:sp>
@@ -3454,6 +3460,12 @@
           <a:p>
             <a:r>
               <a:t>VO: From wave two, each new sector reuses what wave one built. The health sector consumes the identity platform and the data-exchange backbone that already exist. Its run of the method is lighter, because the team, the framework and the governance are in place. It delivers faster and costs less. And every sector that joins makes the next one easier still, because the shared platforms get more complete and the team more practised. The rollout accelerates as it goes — the opposite of a programme that gets harder under its own weight.</a:t>
+            </a:r>
+          </a:p>
+          <a:p/>
+          <a:p>
+            <a:r>
+              <a:t>On screen: a wave roadmap — each wave a smaller block than the last, the platform bar beneath growing, the Board bar across the top (the next slide's subject). Reveal the waves left to right.</a:t>
             </a:r>
           </a:p>
         </p:txBody>
@@ -16772,7 +16784,7 @@
                 </a:solidFill>
                 <a:latin typeface="Arial"/>
               </a:rPr>
-              <a:t>One powerful project through, then another, until its no means nothing.</a:t>
+              <a:t>One powerful project through, then another, until its "no" means nothing.</a:t>
             </a:r>
           </a:p>
         </p:txBody>
@@ -18229,7 +18241,7 @@
                 </a:solidFill>
                 <a:latin typeface="Arial"/>
               </a:rPr>
-              <a:t>The five phases, the four sign-offs, the deliverables, the reuse-before-build default, the binding governance board — none of it is specific to education. It is the method.</a:t>
+              <a:t>The five phases, the four sign-offs, the six deliverables, the reuse-before-build default, the binding governance board — none of it is specific to education. It is the method.</a:t>
             </a:r>
           </a:p>
           <a:p>
@@ -19314,8 +19326,8 @@
         </p:nvSpPr>
         <p:spPr>
           <a:xfrm>
-            <a:off x="658368" y="1600200"/>
-            <a:ext cx="10881360" cy="2651760"/>
+            <a:off x="658368" y="1508760"/>
+            <a:ext cx="10881360" cy="329184"/>
           </a:xfrm>
           <a:prstGeom prst="rect">
             <a:avLst/>
@@ -19328,60 +19340,73 @@
           </a:bodyPr>
           <a:lstStyle/>
           <a:p>
-            <a:pPr>
-              <a:spcAft>
-                <a:spcPts val="1200"/>
-              </a:spcAft>
-            </a:pPr>
-            <a:r>
-              <a:rPr sz="2000" b="0" i="0">
+            <a:r>
+              <a:rPr sz="1200" b="1" i="0">
+                <a:solidFill>
+                  <a:srgbClr val="595959"/>
+                </a:solidFill>
+                <a:latin typeface="Arial"/>
+              </a:rPr>
+              <a:t>WHAT EACH SECTOR PAYS FOR — directional, not a costing</a:t>
+            </a:r>
+          </a:p>
+        </p:txBody>
+      </p:sp>
+      <p:sp>
+        <p:nvSpPr>
+          <p:cNvPr id="5" name="TextBox 4"/>
+          <p:cNvSpPr txBox="1"/>
+          <p:nvPr/>
+        </p:nvSpPr>
+        <p:spPr>
+          <a:xfrm>
+            <a:off x="658368" y="1892807"/>
+            <a:ext cx="2514600" cy="548640"/>
+          </a:xfrm>
+          <a:prstGeom prst="rect">
+            <a:avLst/>
+          </a:prstGeom>
+          <a:noFill/>
+        </p:spPr>
+        <p:txBody>
+          <a:bodyPr wrap="square" anchor="ctr">
+            <a:spAutoFit/>
+          </a:bodyPr>
+          <a:lstStyle/>
+          <a:p>
+            <a:r>
+              <a:rPr sz="1400" b="1" i="0">
                 <a:solidFill>
                   <a:srgbClr val="1A1A1A"/>
                 </a:solidFill>
                 <a:latin typeface="Arial"/>
               </a:rPr>
-              <a:t>The expensive part is the first time — the permanent team, the localised framework, the governance, and above all the shared platforms like identity and data exchange.</a:t>
-            </a:r>
-          </a:p>
-          <a:p>
-            <a:pPr>
-              <a:spcAft>
-                <a:spcPts val="1200"/>
-              </a:spcAft>
-            </a:pPr>
-            <a:r>
-              <a:rPr sz="2000" b="0" i="0">
-                <a:solidFill>
-                  <a:srgbClr val="1A1A1A"/>
-                </a:solidFill>
-                <a:latin typeface="Arial"/>
-              </a:rPr>
-              <a:t>Once those exist, the second sector does not rebuild them; it consumes them. Health reuses the identity platform the education work stood up. Agriculture reuses the data-exchange backbone.</a:t>
-            </a:r>
-          </a:p>
-        </p:txBody>
-      </p:sp>
-      <p:sp>
-        <p:nvSpPr>
-          <p:cNvPr id="5" name="Rounded Rectangle 4"/>
+              <a:t>Sector 1 — education</a:t>
+            </a:r>
+          </a:p>
+        </p:txBody>
+      </p:sp>
+      <p:sp>
+        <p:nvSpPr>
+          <p:cNvPr id="6" name="Rectangle 5"/>
           <p:cNvSpPr/>
           <p:nvPr/>
         </p:nvSpPr>
         <p:spPr>
           <a:xfrm>
-            <a:off x="658368" y="4434840"/>
-            <a:ext cx="10881360" cy="1325880"/>
-          </a:xfrm>
-          <a:prstGeom prst="roundRect">
-            <a:avLst>
-              <a:gd name="adj" fmla="val 4500"/>
-            </a:avLst>
+            <a:off x="3310128" y="1947672"/>
+            <a:ext cx="1289304" cy="438912"/>
+          </a:xfrm>
+          <a:prstGeom prst="rect">
+            <a:avLst/>
           </a:prstGeom>
           <a:solidFill>
-            <a:srgbClr val="E5F5FB"/>
+            <a:srgbClr val="006E96"/>
           </a:solidFill>
-          <a:ln>
-            <a:noFill/>
+          <a:ln w="9525">
+            <a:solidFill>
+              <a:srgbClr val="FFFFFF"/>
+            </a:solidFill>
           </a:ln>
           <a:effectLst/>
         </p:spPr>
@@ -19400,23 +19425,786 @@
           </a:fontRef>
         </p:style>
         <p:txBody>
-          <a:bodyPr rtlCol="0" anchor="ctr"/>
+          <a:bodyPr rtlCol="0" anchor="ctr" lIns="54864" rIns="54864" tIns="0" bIns="0" wrap="square"/>
           <a:lstStyle/>
           <a:p>
             <a:pPr algn="ctr"/>
-          </a:p>
-        </p:txBody>
-      </p:sp>
-      <p:sp>
-        <p:nvSpPr>
-          <p:cNvPr id="6" name="TextBox 5"/>
+            <a:r>
+              <a:rPr sz="1100" b="1" i="0">
+                <a:solidFill>
+                  <a:srgbClr val="FFFFFF"/>
+                </a:solidFill>
+                <a:latin typeface="Arial"/>
+              </a:rPr>
+              <a:t>permanent team</a:t>
+            </a:r>
+          </a:p>
+        </p:txBody>
+      </p:sp>
+      <p:sp>
+        <p:nvSpPr>
+          <p:cNvPr id="7" name="Rectangle 6"/>
+          <p:cNvSpPr/>
+          <p:nvPr/>
+        </p:nvSpPr>
+        <p:spPr>
+          <a:xfrm>
+            <a:off x="4626864" y="1947672"/>
+            <a:ext cx="1042415" cy="438912"/>
+          </a:xfrm>
+          <a:prstGeom prst="rect">
+            <a:avLst/>
+          </a:prstGeom>
+          <a:solidFill>
+            <a:srgbClr val="006E96"/>
+          </a:solidFill>
+          <a:ln w="9525">
+            <a:solidFill>
+              <a:srgbClr val="FFFFFF"/>
+            </a:solidFill>
+          </a:ln>
+          <a:effectLst/>
+        </p:spPr>
+        <p:style>
+          <a:lnRef idx="1">
+            <a:schemeClr val="accent1"/>
+          </a:lnRef>
+          <a:fillRef idx="3">
+            <a:schemeClr val="accent1"/>
+          </a:fillRef>
+          <a:effectRef idx="2">
+            <a:schemeClr val="accent1"/>
+          </a:effectRef>
+          <a:fontRef idx="minor">
+            <a:schemeClr val="lt1"/>
+          </a:fontRef>
+        </p:style>
+        <p:txBody>
+          <a:bodyPr rtlCol="0" anchor="ctr" lIns="54864" rIns="54864" tIns="0" bIns="0" wrap="square"/>
+          <a:lstStyle/>
+          <a:p>
+            <a:pPr algn="ctr"/>
+            <a:r>
+              <a:rPr sz="1100" b="1" i="0">
+                <a:solidFill>
+                  <a:srgbClr val="FFFFFF"/>
+                </a:solidFill>
+                <a:latin typeface="Arial"/>
+              </a:rPr>
+              <a:t>framework</a:t>
+            </a:r>
+          </a:p>
+        </p:txBody>
+      </p:sp>
+      <p:sp>
+        <p:nvSpPr>
+          <p:cNvPr id="8" name="Rectangle 7"/>
+          <p:cNvSpPr/>
+          <p:nvPr/>
+        </p:nvSpPr>
+        <p:spPr>
+          <a:xfrm>
+            <a:off x="5696712" y="1947672"/>
+            <a:ext cx="1042415" cy="438912"/>
+          </a:xfrm>
+          <a:prstGeom prst="rect">
+            <a:avLst/>
+          </a:prstGeom>
+          <a:solidFill>
+            <a:srgbClr val="006E96"/>
+          </a:solidFill>
+          <a:ln w="9525">
+            <a:solidFill>
+              <a:srgbClr val="FFFFFF"/>
+            </a:solidFill>
+          </a:ln>
+          <a:effectLst/>
+        </p:spPr>
+        <p:style>
+          <a:lnRef idx="1">
+            <a:schemeClr val="accent1"/>
+          </a:lnRef>
+          <a:fillRef idx="3">
+            <a:schemeClr val="accent1"/>
+          </a:fillRef>
+          <a:effectRef idx="2">
+            <a:schemeClr val="accent1"/>
+          </a:effectRef>
+          <a:fontRef idx="minor">
+            <a:schemeClr val="lt1"/>
+          </a:fontRef>
+        </p:style>
+        <p:txBody>
+          <a:bodyPr rtlCol="0" anchor="ctr" lIns="54864" rIns="54864" tIns="0" bIns="0" wrap="square"/>
+          <a:lstStyle/>
+          <a:p>
+            <a:pPr algn="ctr"/>
+            <a:r>
+              <a:rPr sz="1100" b="1" i="0">
+                <a:solidFill>
+                  <a:srgbClr val="FFFFFF"/>
+                </a:solidFill>
+                <a:latin typeface="Arial"/>
+              </a:rPr>
+              <a:t>governance</a:t>
+            </a:r>
+          </a:p>
+        </p:txBody>
+      </p:sp>
+      <p:sp>
+        <p:nvSpPr>
+          <p:cNvPr id="9" name="Rectangle 8"/>
+          <p:cNvSpPr/>
+          <p:nvPr/>
+        </p:nvSpPr>
+        <p:spPr>
+          <a:xfrm>
+            <a:off x="6766560" y="1947672"/>
+            <a:ext cx="1947672" cy="438912"/>
+          </a:xfrm>
+          <a:prstGeom prst="rect">
+            <a:avLst/>
+          </a:prstGeom>
+          <a:solidFill>
+            <a:srgbClr val="006E96"/>
+          </a:solidFill>
+          <a:ln w="9525">
+            <a:solidFill>
+              <a:srgbClr val="FFFFFF"/>
+            </a:solidFill>
+          </a:ln>
+          <a:effectLst/>
+        </p:spPr>
+        <p:style>
+          <a:lnRef idx="1">
+            <a:schemeClr val="accent1"/>
+          </a:lnRef>
+          <a:fillRef idx="3">
+            <a:schemeClr val="accent1"/>
+          </a:fillRef>
+          <a:effectRef idx="2">
+            <a:schemeClr val="accent1"/>
+          </a:effectRef>
+          <a:fontRef idx="minor">
+            <a:schemeClr val="lt1"/>
+          </a:fontRef>
+        </p:style>
+        <p:txBody>
+          <a:bodyPr rtlCol="0" anchor="ctr" lIns="54864" rIns="54864" tIns="0" bIns="0" wrap="square"/>
+          <a:lstStyle/>
+          <a:p>
+            <a:pPr algn="ctr"/>
+            <a:r>
+              <a:rPr sz="1100" b="1" i="0">
+                <a:solidFill>
+                  <a:srgbClr val="FFFFFF"/>
+                </a:solidFill>
+                <a:latin typeface="Arial"/>
+              </a:rPr>
+              <a:t>identity · data exchange</a:t>
+            </a:r>
+          </a:p>
+        </p:txBody>
+      </p:sp>
+      <p:sp>
+        <p:nvSpPr>
+          <p:cNvPr id="10" name="Rectangle 9"/>
+          <p:cNvSpPr/>
+          <p:nvPr/>
+        </p:nvSpPr>
+        <p:spPr>
+          <a:xfrm>
+            <a:off x="8741664" y="1947672"/>
+            <a:ext cx="1618488" cy="438912"/>
+          </a:xfrm>
+          <a:prstGeom prst="rect">
+            <a:avLst/>
+          </a:prstGeom>
+          <a:solidFill>
+            <a:srgbClr val="009CD6"/>
+          </a:solidFill>
+          <a:ln w="9525">
+            <a:solidFill>
+              <a:srgbClr val="FFFFFF"/>
+            </a:solidFill>
+          </a:ln>
+          <a:effectLst/>
+        </p:spPr>
+        <p:style>
+          <a:lnRef idx="1">
+            <a:schemeClr val="accent1"/>
+          </a:lnRef>
+          <a:fillRef idx="3">
+            <a:schemeClr val="accent1"/>
+          </a:fillRef>
+          <a:effectRef idx="2">
+            <a:schemeClr val="accent1"/>
+          </a:effectRef>
+          <a:fontRef idx="minor">
+            <a:schemeClr val="lt1"/>
+          </a:fontRef>
+        </p:style>
+        <p:txBody>
+          <a:bodyPr rtlCol="0" anchor="ctr" lIns="54864" rIns="54864" tIns="0" bIns="0" wrap="square"/>
+          <a:lstStyle/>
+          <a:p>
+            <a:pPr algn="ctr"/>
+            <a:r>
+              <a:rPr sz="1100" b="1" i="0">
+                <a:solidFill>
+                  <a:srgbClr val="FFFFFF"/>
+                </a:solidFill>
+                <a:latin typeface="Arial"/>
+              </a:rPr>
+              <a:t>its own architecture</a:t>
+            </a:r>
+          </a:p>
+        </p:txBody>
+      </p:sp>
+      <p:sp>
+        <p:nvSpPr>
+          <p:cNvPr id="11" name="TextBox 10"/>
           <p:cNvSpPr txBox="1"/>
           <p:nvPr/>
         </p:nvSpPr>
         <p:spPr>
           <a:xfrm>
-            <a:off x="859536" y="4626864"/>
-            <a:ext cx="10479024" cy="1051560"/>
+            <a:off x="658368" y="2642615"/>
+            <a:ext cx="2514600" cy="548640"/>
+          </a:xfrm>
+          <a:prstGeom prst="rect">
+            <a:avLst/>
+          </a:prstGeom>
+          <a:noFill/>
+        </p:spPr>
+        <p:txBody>
+          <a:bodyPr wrap="square" anchor="ctr">
+            <a:spAutoFit/>
+          </a:bodyPr>
+          <a:lstStyle/>
+          <a:p>
+            <a:r>
+              <a:rPr sz="1400" b="1" i="0">
+                <a:solidFill>
+                  <a:srgbClr val="1A1A1A"/>
+                </a:solidFill>
+                <a:latin typeface="Arial"/>
+              </a:rPr>
+              <a:t>Sector 2 — health</a:t>
+            </a:r>
+          </a:p>
+        </p:txBody>
+      </p:sp>
+      <p:sp>
+        <p:nvSpPr>
+          <p:cNvPr id="12" name="Rectangle 11"/>
+          <p:cNvSpPr/>
+          <p:nvPr/>
+        </p:nvSpPr>
+        <p:spPr>
+          <a:xfrm>
+            <a:off x="3310128" y="2697479"/>
+            <a:ext cx="1618488" cy="438912"/>
+          </a:xfrm>
+          <a:prstGeom prst="rect">
+            <a:avLst/>
+          </a:prstGeom>
+          <a:solidFill>
+            <a:srgbClr val="009CD6"/>
+          </a:solidFill>
+          <a:ln w="9525">
+            <a:solidFill>
+              <a:srgbClr val="FFFFFF"/>
+            </a:solidFill>
+          </a:ln>
+          <a:effectLst/>
+        </p:spPr>
+        <p:style>
+          <a:lnRef idx="1">
+            <a:schemeClr val="accent1"/>
+          </a:lnRef>
+          <a:fillRef idx="3">
+            <a:schemeClr val="accent1"/>
+          </a:fillRef>
+          <a:effectRef idx="2">
+            <a:schemeClr val="accent1"/>
+          </a:effectRef>
+          <a:fontRef idx="minor">
+            <a:schemeClr val="lt1"/>
+          </a:fontRef>
+        </p:style>
+        <p:txBody>
+          <a:bodyPr rtlCol="0" anchor="ctr" lIns="54864" rIns="54864" tIns="0" bIns="0" wrap="square"/>
+          <a:lstStyle/>
+          <a:p>
+            <a:pPr algn="ctr"/>
+            <a:r>
+              <a:rPr sz="1100" b="1" i="0">
+                <a:solidFill>
+                  <a:srgbClr val="FFFFFF"/>
+                </a:solidFill>
+                <a:latin typeface="Arial"/>
+              </a:rPr>
+              <a:t>its own architecture</a:t>
+            </a:r>
+          </a:p>
+        </p:txBody>
+      </p:sp>
+      <p:sp>
+        <p:nvSpPr>
+          <p:cNvPr id="13" name="Rectangle 12"/>
+          <p:cNvSpPr/>
+          <p:nvPr/>
+        </p:nvSpPr>
+        <p:spPr>
+          <a:xfrm>
+            <a:off x="4956048" y="2697479"/>
+            <a:ext cx="877824" cy="438912"/>
+          </a:xfrm>
+          <a:prstGeom prst="rect">
+            <a:avLst/>
+          </a:prstGeom>
+          <a:solidFill>
+            <a:srgbClr val="E5F5FB"/>
+          </a:solidFill>
+          <a:ln w="9525">
+            <a:solidFill>
+              <a:srgbClr val="FFFFFF"/>
+            </a:solidFill>
+          </a:ln>
+          <a:effectLst/>
+        </p:spPr>
+        <p:style>
+          <a:lnRef idx="1">
+            <a:schemeClr val="accent1"/>
+          </a:lnRef>
+          <a:fillRef idx="3">
+            <a:schemeClr val="accent1"/>
+          </a:fillRef>
+          <a:effectRef idx="2">
+            <a:schemeClr val="accent1"/>
+          </a:effectRef>
+          <a:fontRef idx="minor">
+            <a:schemeClr val="lt1"/>
+          </a:fontRef>
+        </p:style>
+        <p:txBody>
+          <a:bodyPr rtlCol="0" anchor="ctr" lIns="54864" rIns="54864" tIns="0" bIns="0" wrap="square"/>
+          <a:lstStyle/>
+          <a:p>
+            <a:pPr algn="ctr"/>
+            <a:r>
+              <a:rPr sz="1100" b="1" i="0">
+                <a:solidFill>
+                  <a:srgbClr val="006E96"/>
+                </a:solidFill>
+                <a:latin typeface="Arial"/>
+              </a:rPr>
+              <a:t>consumes</a:t>
+            </a:r>
+          </a:p>
+        </p:txBody>
+      </p:sp>
+      <p:sp>
+        <p:nvSpPr>
+          <p:cNvPr id="14" name="TextBox 13"/>
+          <p:cNvSpPr txBox="1"/>
+          <p:nvPr/>
+        </p:nvSpPr>
+        <p:spPr>
+          <a:xfrm>
+            <a:off x="5952744" y="2642615"/>
+            <a:ext cx="5586984" cy="548640"/>
+          </a:xfrm>
+          <a:prstGeom prst="rect">
+            <a:avLst/>
+          </a:prstGeom>
+          <a:noFill/>
+        </p:spPr>
+        <p:txBody>
+          <a:bodyPr wrap="square" anchor="ctr">
+            <a:spAutoFit/>
+          </a:bodyPr>
+          <a:lstStyle/>
+          <a:p>
+            <a:r>
+              <a:rPr sz="1200" b="0" i="1">
+                <a:solidFill>
+                  <a:srgbClr val="595959"/>
+                </a:solidFill>
+                <a:latin typeface="Arial"/>
+              </a:rPr>
+              <a:t>reuses the identity platform education stood up</a:t>
+            </a:r>
+          </a:p>
+        </p:txBody>
+      </p:sp>
+      <p:sp>
+        <p:nvSpPr>
+          <p:cNvPr id="15" name="TextBox 14"/>
+          <p:cNvSpPr txBox="1"/>
+          <p:nvPr/>
+        </p:nvSpPr>
+        <p:spPr>
+          <a:xfrm>
+            <a:off x="658368" y="3392423"/>
+            <a:ext cx="2514600" cy="548640"/>
+          </a:xfrm>
+          <a:prstGeom prst="rect">
+            <a:avLst/>
+          </a:prstGeom>
+          <a:noFill/>
+        </p:spPr>
+        <p:txBody>
+          <a:bodyPr wrap="square" anchor="ctr">
+            <a:spAutoFit/>
+          </a:bodyPr>
+          <a:lstStyle/>
+          <a:p>
+            <a:r>
+              <a:rPr sz="1400" b="1" i="0">
+                <a:solidFill>
+                  <a:srgbClr val="1A1A1A"/>
+                </a:solidFill>
+                <a:latin typeface="Arial"/>
+              </a:rPr>
+              <a:t>Sector 3 — agriculture</a:t>
+            </a:r>
+          </a:p>
+        </p:txBody>
+      </p:sp>
+      <p:sp>
+        <p:nvSpPr>
+          <p:cNvPr id="16" name="Rectangle 15"/>
+          <p:cNvSpPr/>
+          <p:nvPr/>
+        </p:nvSpPr>
+        <p:spPr>
+          <a:xfrm>
+            <a:off x="3310128" y="3447287"/>
+            <a:ext cx="1207007" cy="438912"/>
+          </a:xfrm>
+          <a:prstGeom prst="rect">
+            <a:avLst/>
+          </a:prstGeom>
+          <a:solidFill>
+            <a:srgbClr val="009CD6"/>
+          </a:solidFill>
+          <a:ln w="9525">
+            <a:solidFill>
+              <a:srgbClr val="FFFFFF"/>
+            </a:solidFill>
+          </a:ln>
+          <a:effectLst/>
+        </p:spPr>
+        <p:style>
+          <a:lnRef idx="1">
+            <a:schemeClr val="accent1"/>
+          </a:lnRef>
+          <a:fillRef idx="3">
+            <a:schemeClr val="accent1"/>
+          </a:fillRef>
+          <a:effectRef idx="2">
+            <a:schemeClr val="accent1"/>
+          </a:effectRef>
+          <a:fontRef idx="minor">
+            <a:schemeClr val="lt1"/>
+          </a:fontRef>
+        </p:style>
+        <p:txBody>
+          <a:bodyPr rtlCol="0" anchor="ctr" lIns="54864" rIns="54864" tIns="0" bIns="0" wrap="square"/>
+          <a:lstStyle/>
+          <a:p>
+            <a:pPr algn="ctr"/>
+            <a:r>
+              <a:rPr sz="1100" b="1" i="0">
+                <a:solidFill>
+                  <a:srgbClr val="FFFFFF"/>
+                </a:solidFill>
+                <a:latin typeface="Arial"/>
+              </a:rPr>
+              <a:t>its own</a:t>
+            </a:r>
+          </a:p>
+        </p:txBody>
+      </p:sp>
+      <p:sp>
+        <p:nvSpPr>
+          <p:cNvPr id="17" name="Rectangle 16"/>
+          <p:cNvSpPr/>
+          <p:nvPr/>
+        </p:nvSpPr>
+        <p:spPr>
+          <a:xfrm>
+            <a:off x="4544568" y="3447287"/>
+            <a:ext cx="877824" cy="438912"/>
+          </a:xfrm>
+          <a:prstGeom prst="rect">
+            <a:avLst/>
+          </a:prstGeom>
+          <a:solidFill>
+            <a:srgbClr val="E5F5FB"/>
+          </a:solidFill>
+          <a:ln w="9525">
+            <a:solidFill>
+              <a:srgbClr val="FFFFFF"/>
+            </a:solidFill>
+          </a:ln>
+          <a:effectLst/>
+        </p:spPr>
+        <p:style>
+          <a:lnRef idx="1">
+            <a:schemeClr val="accent1"/>
+          </a:lnRef>
+          <a:fillRef idx="3">
+            <a:schemeClr val="accent1"/>
+          </a:fillRef>
+          <a:effectRef idx="2">
+            <a:schemeClr val="accent1"/>
+          </a:effectRef>
+          <a:fontRef idx="minor">
+            <a:schemeClr val="lt1"/>
+          </a:fontRef>
+        </p:style>
+        <p:txBody>
+          <a:bodyPr rtlCol="0" anchor="ctr" lIns="54864" rIns="54864" tIns="0" bIns="0" wrap="square"/>
+          <a:lstStyle/>
+          <a:p>
+            <a:pPr algn="ctr"/>
+            <a:r>
+              <a:rPr sz="1100" b="1" i="0">
+                <a:solidFill>
+                  <a:srgbClr val="006E96"/>
+                </a:solidFill>
+                <a:latin typeface="Arial"/>
+              </a:rPr>
+              <a:t>consumes</a:t>
+            </a:r>
+          </a:p>
+        </p:txBody>
+      </p:sp>
+      <p:sp>
+        <p:nvSpPr>
+          <p:cNvPr id="18" name="TextBox 17"/>
+          <p:cNvSpPr txBox="1"/>
+          <p:nvPr/>
+        </p:nvSpPr>
+        <p:spPr>
+          <a:xfrm>
+            <a:off x="5541264" y="3392423"/>
+            <a:ext cx="5998464" cy="548640"/>
+          </a:xfrm>
+          <a:prstGeom prst="rect">
+            <a:avLst/>
+          </a:prstGeom>
+          <a:noFill/>
+        </p:spPr>
+        <p:txBody>
+          <a:bodyPr wrap="square" anchor="ctr">
+            <a:spAutoFit/>
+          </a:bodyPr>
+          <a:lstStyle/>
+          <a:p>
+            <a:r>
+              <a:rPr sz="1200" b="0" i="1">
+                <a:solidFill>
+                  <a:srgbClr val="595959"/>
+                </a:solidFill>
+                <a:latin typeface="Arial"/>
+              </a:rPr>
+              <a:t>reuses the data-exchange backbone</a:t>
+            </a:r>
+          </a:p>
+        </p:txBody>
+      </p:sp>
+      <p:sp>
+        <p:nvSpPr>
+          <p:cNvPr id="19" name="TextBox 18"/>
+          <p:cNvSpPr txBox="1"/>
+          <p:nvPr/>
+        </p:nvSpPr>
+        <p:spPr>
+          <a:xfrm>
+            <a:off x="658368" y="4142231"/>
+            <a:ext cx="2514600" cy="548640"/>
+          </a:xfrm>
+          <a:prstGeom prst="rect">
+            <a:avLst/>
+          </a:prstGeom>
+          <a:noFill/>
+        </p:spPr>
+        <p:txBody>
+          <a:bodyPr wrap="square" anchor="ctr">
+            <a:spAutoFit/>
+          </a:bodyPr>
+          <a:lstStyle/>
+          <a:p>
+            <a:r>
+              <a:rPr sz="1400" b="1" i="0">
+                <a:solidFill>
+                  <a:srgbClr val="1A1A1A"/>
+                </a:solidFill>
+                <a:latin typeface="Arial"/>
+              </a:rPr>
+              <a:t>Sector 4 — social protection</a:t>
+            </a:r>
+          </a:p>
+        </p:txBody>
+      </p:sp>
+      <p:sp>
+        <p:nvSpPr>
+          <p:cNvPr id="20" name="Rectangle 19"/>
+          <p:cNvSpPr/>
+          <p:nvPr/>
+        </p:nvSpPr>
+        <p:spPr>
+          <a:xfrm>
+            <a:off x="3310128" y="4197095"/>
+            <a:ext cx="960120" cy="438912"/>
+          </a:xfrm>
+          <a:prstGeom prst="rect">
+            <a:avLst/>
+          </a:prstGeom>
+          <a:solidFill>
+            <a:srgbClr val="009CD6"/>
+          </a:solidFill>
+          <a:ln w="9525">
+            <a:solidFill>
+              <a:srgbClr val="FFFFFF"/>
+            </a:solidFill>
+          </a:ln>
+          <a:effectLst/>
+        </p:spPr>
+        <p:style>
+          <a:lnRef idx="1">
+            <a:schemeClr val="accent1"/>
+          </a:lnRef>
+          <a:fillRef idx="3">
+            <a:schemeClr val="accent1"/>
+          </a:fillRef>
+          <a:effectRef idx="2">
+            <a:schemeClr val="accent1"/>
+          </a:effectRef>
+          <a:fontRef idx="minor">
+            <a:schemeClr val="lt1"/>
+          </a:fontRef>
+        </p:style>
+        <p:txBody>
+          <a:bodyPr rtlCol="0" anchor="ctr" lIns="54864" rIns="54864" tIns="0" bIns="0" wrap="square"/>
+          <a:lstStyle/>
+          <a:p>
+            <a:pPr algn="ctr"/>
+            <a:r>
+              <a:rPr sz="1100" b="1" i="0">
+                <a:solidFill>
+                  <a:srgbClr val="FFFFFF"/>
+                </a:solidFill>
+                <a:latin typeface="Arial"/>
+              </a:rPr>
+              <a:t>its own</a:t>
+            </a:r>
+          </a:p>
+        </p:txBody>
+      </p:sp>
+      <p:sp>
+        <p:nvSpPr>
+          <p:cNvPr id="21" name="Rectangle 20"/>
+          <p:cNvSpPr/>
+          <p:nvPr/>
+        </p:nvSpPr>
+        <p:spPr>
+          <a:xfrm>
+            <a:off x="4297680" y="4197095"/>
+            <a:ext cx="877824" cy="438912"/>
+          </a:xfrm>
+          <a:prstGeom prst="rect">
+            <a:avLst/>
+          </a:prstGeom>
+          <a:solidFill>
+            <a:srgbClr val="E5F5FB"/>
+          </a:solidFill>
+          <a:ln w="9525">
+            <a:solidFill>
+              <a:srgbClr val="FFFFFF"/>
+            </a:solidFill>
+          </a:ln>
+          <a:effectLst/>
+        </p:spPr>
+        <p:style>
+          <a:lnRef idx="1">
+            <a:schemeClr val="accent1"/>
+          </a:lnRef>
+          <a:fillRef idx="3">
+            <a:schemeClr val="accent1"/>
+          </a:fillRef>
+          <a:effectRef idx="2">
+            <a:schemeClr val="accent1"/>
+          </a:effectRef>
+          <a:fontRef idx="minor">
+            <a:schemeClr val="lt1"/>
+          </a:fontRef>
+        </p:style>
+        <p:txBody>
+          <a:bodyPr rtlCol="0" anchor="ctr" lIns="54864" rIns="54864" tIns="0" bIns="0" wrap="square"/>
+          <a:lstStyle/>
+          <a:p>
+            <a:pPr algn="ctr"/>
+            <a:r>
+              <a:rPr sz="1100" b="1" i="0">
+                <a:solidFill>
+                  <a:srgbClr val="006E96"/>
+                </a:solidFill>
+                <a:latin typeface="Arial"/>
+              </a:rPr>
+              <a:t>consumes</a:t>
+            </a:r>
+          </a:p>
+        </p:txBody>
+      </p:sp>
+      <p:sp>
+        <p:nvSpPr>
+          <p:cNvPr id="22" name="TextBox 21"/>
+          <p:cNvSpPr txBox="1"/>
+          <p:nvPr/>
+        </p:nvSpPr>
+        <p:spPr>
+          <a:xfrm>
+            <a:off x="5294376" y="4142231"/>
+            <a:ext cx="6245352" cy="548640"/>
+          </a:xfrm>
+          <a:prstGeom prst="rect">
+            <a:avLst/>
+          </a:prstGeom>
+          <a:noFill/>
+        </p:spPr>
+        <p:txBody>
+          <a:bodyPr wrap="square" anchor="ctr">
+            <a:spAutoFit/>
+          </a:bodyPr>
+          <a:lstStyle/>
+          <a:p>
+            <a:r>
+              <a:rPr sz="1200" b="0" i="1">
+                <a:solidFill>
+                  <a:srgbClr val="595959"/>
+                </a:solidFill>
+                <a:latin typeface="Arial"/>
+              </a:rPr>
+              <a:t>the platforms are more complete each time</a:t>
+            </a:r>
+          </a:p>
+        </p:txBody>
+      </p:sp>
+      <p:sp>
+        <p:nvSpPr>
+          <p:cNvPr id="23" name="TextBox 22"/>
+          <p:cNvSpPr txBox="1"/>
+          <p:nvPr/>
+        </p:nvSpPr>
+        <p:spPr>
+          <a:xfrm>
+            <a:off x="658368" y="5760720"/>
+            <a:ext cx="10881360" cy="548640"/>
           </a:xfrm>
           <a:prstGeom prst="rect">
             <a:avLst/>
@@ -19429,13 +20217,8 @@
           </a:bodyPr>
           <a:lstStyle/>
           <a:p>
-            <a:pPr>
-              <a:spcAft>
-                <a:spcPts val="700"/>
-              </a:spcAft>
-            </a:pPr>
-            <a:r>
-              <a:rPr sz="2300" b="1" i="0">
+            <a:r>
+              <a:rPr sz="1550" b="1" i="0">
                 <a:solidFill>
                   <a:srgbClr val="006E96"/>
                 </a:solidFill>
@@ -19448,7 +20231,7 @@
       </p:sp>
       <p:sp>
         <p:nvSpPr>
-          <p:cNvPr id="7" name="TextBox 6"/>
+          <p:cNvPr id="24" name="TextBox 23"/>
           <p:cNvSpPr txBox="1"/>
           <p:nvPr/>
         </p:nvSpPr>
@@ -24662,73 +25445,18 @@
       </p:sp>
       <p:sp>
         <p:nvSpPr>
-          <p:cNvPr id="4" name="TextBox 3"/>
-          <p:cNvSpPr txBox="1"/>
-          <p:nvPr/>
-        </p:nvSpPr>
-        <p:spPr>
-          <a:xfrm>
-            <a:off x="658368" y="1600200"/>
-            <a:ext cx="10881360" cy="2651760"/>
-          </a:xfrm>
-          <a:prstGeom prst="rect">
-            <a:avLst/>
-          </a:prstGeom>
-          <a:noFill/>
-        </p:spPr>
-        <p:txBody>
-          <a:bodyPr wrap="square">
-            <a:spAutoFit/>
-          </a:bodyPr>
-          <a:lstStyle/>
-          <a:p>
-            <a:pPr>
-              <a:spcAft>
-                <a:spcPts val="1200"/>
-              </a:spcAft>
-            </a:pPr>
-            <a:r>
-              <a:rPr sz="2000" b="0" i="0">
-                <a:solidFill>
-                  <a:srgbClr val="1A1A1A"/>
-                </a:solidFill>
-                <a:latin typeface="Arial"/>
-              </a:rPr>
-              <a:t>Pick the sector with a clear flagship the minister cares about — the single learner record, the single patient record — and run the full method there, end to end.</a:t>
-            </a:r>
-          </a:p>
-          <a:p>
-            <a:pPr>
-              <a:spcAft>
-                <a:spcPts val="1200"/>
-              </a:spcAft>
-            </a:pPr>
-            <a:r>
-              <a:rPr sz="2000" b="0" i="0">
-                <a:solidFill>
-                  <a:srgbClr val="1A1A1A"/>
-                </a:solidFill>
-                <a:latin typeface="Arial"/>
-              </a:rPr>
-              <a:t>But notice what Wave 1 really builds: not just that sector's architecture, but the national foundations — the permanent team, the governance board, and the first shared platforms like identity and data exchange.</a:t>
-            </a:r>
-          </a:p>
-        </p:txBody>
-      </p:sp>
-      <p:sp>
-        <p:nvSpPr>
-          <p:cNvPr id="5" name="Rounded Rectangle 4"/>
+          <p:cNvPr id="4" name="Rounded Rectangle 3"/>
           <p:cNvSpPr/>
           <p:nvPr/>
         </p:nvSpPr>
         <p:spPr>
           <a:xfrm>
-            <a:off x="658368" y="4434840"/>
-            <a:ext cx="10881360" cy="1325880"/>
+            <a:off x="2651760" y="1737360"/>
+            <a:ext cx="4754880" cy="1463040"/>
           </a:xfrm>
           <a:prstGeom prst="roundRect">
             <a:avLst>
-              <a:gd name="adj" fmla="val 4500"/>
+              <a:gd name="adj" fmla="val 8000"/>
             </a:avLst>
           </a:prstGeom>
           <a:solidFill>
@@ -24754,6 +25482,170 @@
           </a:fontRef>
         </p:style>
         <p:txBody>
+          <a:bodyPr rtlCol="0" anchor="t" lIns="128016" rIns="128016" tIns="91440" bIns="54864" wrap="square"/>
+          <a:lstStyle/>
+          <a:p>
+            <a:pPr algn="l">
+              <a:spcAft>
+                <a:spcPts val="300"/>
+              </a:spcAft>
+            </a:pPr>
+            <a:r>
+              <a:rPr sz="1500" b="1" i="0">
+                <a:solidFill>
+                  <a:srgbClr val="006E96"/>
+                </a:solidFill>
+                <a:latin typeface="Arial"/>
+              </a:rPr>
+              <a:t>WAVE 1 — ONE SECTOR, THE FULL METHOD, END TO END</a:t>
+            </a:r>
+          </a:p>
+          <a:p>
+            <a:pPr algn="l">
+              <a:spcAft>
+                <a:spcPts val="300"/>
+              </a:spcAft>
+            </a:pPr>
+            <a:r>
+              <a:rPr sz="1300" b="0" i="0">
+                <a:solidFill>
+                  <a:srgbClr val="1A1A1A"/>
+                </a:solidFill>
+                <a:latin typeface="Arial"/>
+              </a:rPr>
+              <a:t>A sector with a clear flagship the minister cares about — the single learner record, the single patient record.</a:t>
+            </a:r>
+          </a:p>
+        </p:txBody>
+      </p:sp>
+      <p:sp>
+        <p:nvSpPr>
+          <p:cNvPr id="5" name="Rounded Rectangle 4"/>
+          <p:cNvSpPr/>
+          <p:nvPr/>
+        </p:nvSpPr>
+        <p:spPr>
+          <a:xfrm>
+            <a:off x="658368" y="3383280"/>
+            <a:ext cx="8732520" cy="1600200"/>
+          </a:xfrm>
+          <a:prstGeom prst="roundRect">
+            <a:avLst>
+              <a:gd name="adj" fmla="val 8000"/>
+            </a:avLst>
+          </a:prstGeom>
+          <a:solidFill>
+            <a:srgbClr val="006E96"/>
+          </a:solidFill>
+          <a:ln>
+            <a:noFill/>
+          </a:ln>
+          <a:effectLst/>
+        </p:spPr>
+        <p:style>
+          <a:lnRef idx="1">
+            <a:schemeClr val="accent1"/>
+          </a:lnRef>
+          <a:fillRef idx="3">
+            <a:schemeClr val="accent1"/>
+          </a:fillRef>
+          <a:effectRef idx="2">
+            <a:schemeClr val="accent1"/>
+          </a:effectRef>
+          <a:fontRef idx="minor">
+            <a:schemeClr val="lt1"/>
+          </a:fontRef>
+        </p:style>
+        <p:txBody>
+          <a:bodyPr rtlCol="0" anchor="t" lIns="128016" rIns="128016" tIns="91440" bIns="54864" wrap="square"/>
+          <a:lstStyle/>
+          <a:p>
+            <a:pPr algn="l">
+              <a:spcAft>
+                <a:spcPts val="300"/>
+              </a:spcAft>
+            </a:pPr>
+            <a:r>
+              <a:rPr sz="1500" b="1" i="0">
+                <a:solidFill>
+                  <a:srgbClr val="FFFFFF"/>
+                </a:solidFill>
+                <a:latin typeface="Arial"/>
+              </a:rPr>
+              <a:t>WHAT WAVE 1 REALLY BUILDS — THE NATIONAL FOUNDATIONS</a:t>
+            </a:r>
+          </a:p>
+          <a:p>
+            <a:pPr algn="l">
+              <a:spcAft>
+                <a:spcPts val="300"/>
+              </a:spcAft>
+            </a:pPr>
+            <a:r>
+              <a:rPr sz="1300" b="0" i="0">
+                <a:solidFill>
+                  <a:srgbClr val="FFFFFF"/>
+                </a:solidFill>
+                <a:latin typeface="Arial"/>
+              </a:rPr>
+              <a:t>The permanent team  ·  the governance board  ·  the first shared platforms: identity, data exchange</a:t>
+            </a:r>
+          </a:p>
+          <a:p>
+            <a:pPr algn="l">
+              <a:spcAft>
+                <a:spcPts val="300"/>
+              </a:spcAft>
+            </a:pPr>
+            <a:r>
+              <a:rPr sz="1300" b="0" i="0">
+                <a:solidFill>
+                  <a:srgbClr val="FFFFFF"/>
+                </a:solidFill>
+                <a:latin typeface="Arial"/>
+              </a:rPr>
+              <a:t>Every later sector stands on this — none of them builds it again.</a:t>
+            </a:r>
+          </a:p>
+        </p:txBody>
+      </p:sp>
+      <p:sp>
+        <p:nvSpPr>
+          <p:cNvPr id="6" name="Rectangle 5"/>
+          <p:cNvSpPr/>
+          <p:nvPr/>
+        </p:nvSpPr>
+        <p:spPr>
+          <a:xfrm>
+            <a:off x="9646920" y="1737360"/>
+            <a:ext cx="45720" cy="3246120"/>
+          </a:xfrm>
+          <a:prstGeom prst="rect">
+            <a:avLst/>
+          </a:prstGeom>
+          <a:solidFill>
+            <a:srgbClr val="009CD6"/>
+          </a:solidFill>
+          <a:ln>
+            <a:noFill/>
+          </a:ln>
+          <a:effectLst/>
+        </p:spPr>
+        <p:style>
+          <a:lnRef idx="1">
+            <a:schemeClr val="accent1"/>
+          </a:lnRef>
+          <a:fillRef idx="3">
+            <a:schemeClr val="accent1"/>
+          </a:fillRef>
+          <a:effectRef idx="2">
+            <a:schemeClr val="accent1"/>
+          </a:effectRef>
+          <a:fontRef idx="minor">
+            <a:schemeClr val="lt1"/>
+          </a:fontRef>
+        </p:style>
+        <p:txBody>
           <a:bodyPr rtlCol="0" anchor="ctr"/>
           <a:lstStyle/>
           <a:p>
@@ -24763,14 +25655,14 @@
       </p:sp>
       <p:sp>
         <p:nvSpPr>
-          <p:cNvPr id="6" name="TextBox 5"/>
+          <p:cNvPr id="7" name="TextBox 6"/>
           <p:cNvSpPr txBox="1"/>
           <p:nvPr/>
         </p:nvSpPr>
         <p:spPr>
           <a:xfrm>
-            <a:off x="859536" y="4626864"/>
-            <a:ext cx="10479024" cy="1051560"/>
+            <a:off x="9829800" y="1737360"/>
+            <a:ext cx="1737360" cy="3246120"/>
           </a:xfrm>
           <a:prstGeom prst="rect">
             <a:avLst/>
@@ -24785,11 +25677,61 @@
           <a:p>
             <a:pPr>
               <a:spcAft>
-                <a:spcPts val="700"/>
+                <a:spcPts val="800"/>
               </a:spcAft>
             </a:pPr>
             <a:r>
-              <a:rPr sz="2300" b="1" i="0">
+              <a:rPr sz="1250" b="0" i="1">
+                <a:solidFill>
+                  <a:srgbClr val="595959"/>
+                </a:solidFill>
+                <a:latin typeface="Arial"/>
+              </a:rPr>
+              <a:t>The sector is what the minister sees.</a:t>
+            </a:r>
+          </a:p>
+          <a:p>
+            <a:pPr>
+              <a:spcAft>
+                <a:spcPts val="800"/>
+              </a:spcAft>
+            </a:pPr>
+            <a:r>
+              <a:rPr sz="1250" b="0" i="1">
+                <a:solidFill>
+                  <a:srgbClr val="595959"/>
+                </a:solidFill>
+                <a:latin typeface="Arial"/>
+              </a:rPr>
+              <a:t>The base is what the country keeps.</a:t>
+            </a:r>
+          </a:p>
+        </p:txBody>
+      </p:sp>
+      <p:sp>
+        <p:nvSpPr>
+          <p:cNvPr id="8" name="TextBox 7"/>
+          <p:cNvSpPr txBox="1"/>
+          <p:nvPr/>
+        </p:nvSpPr>
+        <p:spPr>
+          <a:xfrm>
+            <a:off x="658368" y="5760720"/>
+            <a:ext cx="10881360" cy="548640"/>
+          </a:xfrm>
+          <a:prstGeom prst="rect">
+            <a:avLst/>
+          </a:prstGeom>
+          <a:noFill/>
+        </p:spPr>
+        <p:txBody>
+          <a:bodyPr wrap="square">
+            <a:spAutoFit/>
+          </a:bodyPr>
+          <a:lstStyle/>
+          <a:p>
+            <a:r>
+              <a:rPr sz="1550" b="1" i="0">
                 <a:solidFill>
                   <a:srgbClr val="006E96"/>
                 </a:solidFill>
@@ -24802,7 +25744,7 @@
       </p:sp>
       <p:sp>
         <p:nvSpPr>
-          <p:cNvPr id="7" name="TextBox 6"/>
+          <p:cNvPr id="9" name="TextBox 8"/>
           <p:cNvSpPr txBox="1"/>
           <p:nvPr/>
         </p:nvSpPr>
@@ -25261,7 +26203,7 @@
                 </a:solidFill>
                 <a:latin typeface="Arial"/>
               </a:rPr>
-              <a:t>Estonia — mature</a:t>
+              <a:t>Estonia — mature, and the reference the others are measured against</a:t>
             </a:r>
           </a:p>
           <a:p>
@@ -25448,73 +26390,164 @@
       </p:sp>
       <p:sp>
         <p:nvSpPr>
-          <p:cNvPr id="4" name="TextBox 3"/>
-          <p:cNvSpPr txBox="1"/>
-          <p:nvPr/>
-        </p:nvSpPr>
-        <p:spPr>
-          <a:xfrm>
-            <a:off x="658368" y="1600200"/>
-            <a:ext cx="10881360" cy="2651760"/>
-          </a:xfrm>
-          <a:prstGeom prst="rect">
-            <a:avLst/>
-          </a:prstGeom>
-          <a:noFill/>
-        </p:spPr>
-        <p:txBody>
-          <a:bodyPr wrap="square">
-            <a:spAutoFit/>
-          </a:bodyPr>
-          <a:lstStyle/>
-          <a:p>
-            <a:pPr>
+          <p:cNvPr id="4" name="Rounded Rectangle 3"/>
+          <p:cNvSpPr/>
+          <p:nvPr/>
+        </p:nvSpPr>
+        <p:spPr>
+          <a:xfrm>
+            <a:off x="658368" y="1554480"/>
+            <a:ext cx="10881360" cy="457200"/>
+          </a:xfrm>
+          <a:prstGeom prst="roundRect">
+            <a:avLst>
+              <a:gd name="adj" fmla="val 30000"/>
+            </a:avLst>
+          </a:prstGeom>
+          <a:solidFill>
+            <a:srgbClr val="006E96"/>
+          </a:solidFill>
+          <a:ln>
+            <a:noFill/>
+          </a:ln>
+          <a:effectLst/>
+        </p:spPr>
+        <p:style>
+          <a:lnRef idx="1">
+            <a:schemeClr val="accent1"/>
+          </a:lnRef>
+          <a:fillRef idx="3">
+            <a:schemeClr val="accent1"/>
+          </a:fillRef>
+          <a:effectRef idx="2">
+            <a:schemeClr val="accent1"/>
+          </a:effectRef>
+          <a:fontRef idx="minor">
+            <a:schemeClr val="lt1"/>
+          </a:fontRef>
+        </p:style>
+        <p:txBody>
+          <a:bodyPr rtlCol="0" anchor="ctr" wrap="square"/>
+          <a:lstStyle/>
+          <a:p>
+            <a:pPr algn="ctr"/>
+            <a:r>
+              <a:rPr sz="1200" b="1" i="0">
+                <a:solidFill>
+                  <a:srgbClr val="FFFFFF"/>
+                </a:solidFill>
+                <a:latin typeface="Arial"/>
+              </a:rPr>
+              <a:t>THE EA BOARD GOVERNS THE PIPELINE — which sector next, what each must reuse, where an exception is warranted</a:t>
+            </a:r>
+          </a:p>
+        </p:txBody>
+      </p:sp>
+      <p:sp>
+        <p:nvSpPr>
+          <p:cNvPr id="5" name="Rounded Rectangle 4"/>
+          <p:cNvSpPr/>
+          <p:nvPr/>
+        </p:nvSpPr>
+        <p:spPr>
+          <a:xfrm>
+            <a:off x="658368" y="2285999"/>
+            <a:ext cx="3574222" cy="2606040"/>
+          </a:xfrm>
+          <a:prstGeom prst="roundRect">
+            <a:avLst>
+              <a:gd name="adj" fmla="val 8000"/>
+            </a:avLst>
+          </a:prstGeom>
+          <a:solidFill>
+            <a:srgbClr val="009CD6"/>
+          </a:solidFill>
+          <a:ln>
+            <a:noFill/>
+          </a:ln>
+          <a:effectLst/>
+        </p:spPr>
+        <p:style>
+          <a:lnRef idx="1">
+            <a:schemeClr val="accent1"/>
+          </a:lnRef>
+          <a:fillRef idx="3">
+            <a:schemeClr val="accent1"/>
+          </a:fillRef>
+          <a:effectRef idx="2">
+            <a:schemeClr val="accent1"/>
+          </a:effectRef>
+          <a:fontRef idx="minor">
+            <a:schemeClr val="lt1"/>
+          </a:fontRef>
+        </p:style>
+        <p:txBody>
+          <a:bodyPr rtlCol="0" anchor="t" lIns="128016" rIns="128016" tIns="91440" bIns="54864" wrap="square"/>
+          <a:lstStyle/>
+          <a:p>
+            <a:pPr algn="l">
               <a:spcAft>
-                <a:spcPts val="1200"/>
+                <a:spcPts val="300"/>
               </a:spcAft>
             </a:pPr>
             <a:r>
-              <a:rPr sz="2000" b="0" i="0">
-                <a:solidFill>
-                  <a:srgbClr val="1A1A1A"/>
-                </a:solidFill>
-                <a:latin typeface="Arial"/>
-              </a:rPr>
-              <a:t>Each new sector consumes the shared platforms Wave 1 built, runs a lighter method because the team, the framework and the governance are already in place, and delivers faster for less.</a:t>
-            </a:r>
-          </a:p>
-          <a:p>
-            <a:pPr>
+              <a:rPr sz="1300" b="1" i="0">
+                <a:solidFill>
+                  <a:srgbClr val="FFFFFF"/>
+                </a:solidFill>
+                <a:latin typeface="Arial"/>
+              </a:rPr>
+              <a:t>WAVE 1 — education</a:t>
+            </a:r>
+          </a:p>
+          <a:p>
+            <a:pPr algn="l">
               <a:spcAft>
-                <a:spcPts val="1200"/>
+                <a:spcPts val="300"/>
               </a:spcAft>
             </a:pPr>
             <a:r>
-              <a:rPr sz="2000" b="0" i="0">
-                <a:solidFill>
-                  <a:srgbClr val="1A1A1A"/>
-                </a:solidFill>
-                <a:latin typeface="Arial"/>
-              </a:rPr>
-              <a:t>Every sector that joins makes the next one easier still — the platforms get more complete and the team more practised.</a:t>
-            </a:r>
-          </a:p>
-        </p:txBody>
-      </p:sp>
-      <p:sp>
-        <p:nvSpPr>
-          <p:cNvPr id="5" name="Rounded Rectangle 4"/>
+              <a:rPr sz="1150" b="0" i="0">
+                <a:solidFill>
+                  <a:srgbClr val="FFFFFF"/>
+                </a:solidFill>
+                <a:latin typeface="Arial"/>
+              </a:rPr>
+              <a:t>Full method, end to end</a:t>
+            </a:r>
+          </a:p>
+          <a:p>
+            <a:pPr algn="l">
+              <a:spcAft>
+                <a:spcPts val="300"/>
+              </a:spcAft>
+            </a:pPr>
+            <a:r>
+              <a:rPr sz="1150" b="0" i="0">
+                <a:solidFill>
+                  <a:srgbClr val="FFFFFF"/>
+                </a:solidFill>
+                <a:latin typeface="Arial"/>
+              </a:rPr>
+              <a:t>Builds the team, the board, identity, data exchange</a:t>
+            </a:r>
+          </a:p>
+        </p:txBody>
+      </p:sp>
+      <p:sp>
+        <p:nvSpPr>
+          <p:cNvPr id="6" name="Rounded Rectangle 5"/>
           <p:cNvSpPr/>
           <p:nvPr/>
         </p:nvSpPr>
         <p:spPr>
           <a:xfrm>
-            <a:off x="658368" y="4434840"/>
-            <a:ext cx="10881360" cy="1325880"/>
+            <a:off x="4397182" y="2859328"/>
+            <a:ext cx="2792361" cy="2032711"/>
           </a:xfrm>
           <a:prstGeom prst="roundRect">
             <a:avLst>
-              <a:gd name="adj" fmla="val 4500"/>
+              <a:gd name="adj" fmla="val 8000"/>
             </a:avLst>
           </a:prstGeom>
           <a:solidFill>
@@ -25540,6 +26573,369 @@
           </a:fontRef>
         </p:style>
         <p:txBody>
+          <a:bodyPr rtlCol="0" anchor="t" lIns="128016" rIns="128016" tIns="91440" bIns="54864" wrap="square"/>
+          <a:lstStyle/>
+          <a:p>
+            <a:pPr algn="l">
+              <a:spcAft>
+                <a:spcPts val="300"/>
+              </a:spcAft>
+            </a:pPr>
+            <a:r>
+              <a:rPr sz="1300" b="1" i="0">
+                <a:solidFill>
+                  <a:srgbClr val="006E96"/>
+                </a:solidFill>
+                <a:latin typeface="Arial"/>
+              </a:rPr>
+              <a:t>WAVE 2 — health</a:t>
+            </a:r>
+          </a:p>
+          <a:p>
+            <a:pPr algn="l">
+              <a:spcAft>
+                <a:spcPts val="300"/>
+              </a:spcAft>
+            </a:pPr>
+            <a:r>
+              <a:rPr sz="1150" b="0" i="0">
+                <a:solidFill>
+                  <a:srgbClr val="1A1A1A"/>
+                </a:solidFill>
+                <a:latin typeface="Arial"/>
+              </a:rPr>
+              <a:t>Consumes the platforms</a:t>
+            </a:r>
+          </a:p>
+          <a:p>
+            <a:pPr algn="l">
+              <a:spcAft>
+                <a:spcPts val="300"/>
+              </a:spcAft>
+            </a:pPr>
+            <a:r>
+              <a:rPr sz="1150" b="0" i="0">
+                <a:solidFill>
+                  <a:srgbClr val="1A1A1A"/>
+                </a:solidFill>
+                <a:latin typeface="Arial"/>
+              </a:rPr>
+              <a:t>Lighter method — team and governance in place</a:t>
+            </a:r>
+          </a:p>
+        </p:txBody>
+      </p:sp>
+      <p:cxnSp>
+        <p:nvCxnSpPr>
+          <p:cNvPr id="7" name="Connector 6"/>
+          <p:cNvCxnSpPr/>
+          <p:nvPr/>
+        </p:nvCxnSpPr>
+        <p:spPr>
+          <a:xfrm>
+            <a:off x="4250878" y="4480559"/>
+            <a:ext cx="128016" cy="0"/>
+          </a:xfrm>
+          <a:prstGeom prst="line">
+            <a:avLst/>
+          </a:prstGeom>
+          <a:ln w="25400">
+            <a:solidFill>
+              <a:srgbClr val="006E96"/>
+            </a:solidFill>
+            <a:tailEnd type="triangle" w="med" len="med"/>
+          </a:ln>
+        </p:spPr>
+        <p:style>
+          <a:lnRef idx="2">
+            <a:schemeClr val="accent1"/>
+          </a:lnRef>
+          <a:fillRef idx="0">
+            <a:schemeClr val="accent1"/>
+          </a:fillRef>
+          <a:effectRef idx="1">
+            <a:schemeClr val="accent1"/>
+          </a:effectRef>
+          <a:fontRef idx="minor">
+            <a:schemeClr val="tx1"/>
+          </a:fontRef>
+        </p:style>
+      </p:cxnSp>
+      <p:sp>
+        <p:nvSpPr>
+          <p:cNvPr id="8" name="Rounded Rectangle 7"/>
+          <p:cNvSpPr/>
+          <p:nvPr/>
+        </p:nvSpPr>
+        <p:spPr>
+          <a:xfrm>
+            <a:off x="7354135" y="3276295"/>
+            <a:ext cx="2233889" cy="1615744"/>
+          </a:xfrm>
+          <a:prstGeom prst="roundRect">
+            <a:avLst>
+              <a:gd name="adj" fmla="val 8000"/>
+            </a:avLst>
+          </a:prstGeom>
+          <a:solidFill>
+            <a:srgbClr val="E5F5FB"/>
+          </a:solidFill>
+          <a:ln>
+            <a:noFill/>
+          </a:ln>
+          <a:effectLst/>
+        </p:spPr>
+        <p:style>
+          <a:lnRef idx="1">
+            <a:schemeClr val="accent1"/>
+          </a:lnRef>
+          <a:fillRef idx="3">
+            <a:schemeClr val="accent1"/>
+          </a:fillRef>
+          <a:effectRef idx="2">
+            <a:schemeClr val="accent1"/>
+          </a:effectRef>
+          <a:fontRef idx="minor">
+            <a:schemeClr val="lt1"/>
+          </a:fontRef>
+        </p:style>
+        <p:txBody>
+          <a:bodyPr rtlCol="0" anchor="t" lIns="128016" rIns="128016" tIns="91440" bIns="54864" wrap="square"/>
+          <a:lstStyle/>
+          <a:p>
+            <a:pPr algn="l">
+              <a:spcAft>
+                <a:spcPts val="300"/>
+              </a:spcAft>
+            </a:pPr>
+            <a:r>
+              <a:rPr sz="1300" b="1" i="0">
+                <a:solidFill>
+                  <a:srgbClr val="006E96"/>
+                </a:solidFill>
+                <a:latin typeface="Arial"/>
+              </a:rPr>
+              <a:t>WAVE 3 — agriculture</a:t>
+            </a:r>
+          </a:p>
+          <a:p>
+            <a:pPr algn="l">
+              <a:spcAft>
+                <a:spcPts val="300"/>
+              </a:spcAft>
+            </a:pPr>
+            <a:r>
+              <a:rPr sz="1150" b="0" i="0">
+                <a:solidFill>
+                  <a:srgbClr val="1A1A1A"/>
+                </a:solidFill>
+                <a:latin typeface="Arial"/>
+              </a:rPr>
+              <a:t>Consumes more</a:t>
+            </a:r>
+          </a:p>
+          <a:p>
+            <a:pPr algn="l">
+              <a:spcAft>
+                <a:spcPts val="300"/>
+              </a:spcAft>
+            </a:pPr>
+            <a:r>
+              <a:rPr sz="1150" b="0" i="0">
+                <a:solidFill>
+                  <a:srgbClr val="1A1A1A"/>
+                </a:solidFill>
+                <a:latin typeface="Arial"/>
+              </a:rPr>
+              <a:t>Faster, for less</a:t>
+            </a:r>
+          </a:p>
+        </p:txBody>
+      </p:sp>
+      <p:cxnSp>
+        <p:nvCxnSpPr>
+          <p:cNvPr id="9" name="Connector 8"/>
+          <p:cNvCxnSpPr/>
+          <p:nvPr/>
+        </p:nvCxnSpPr>
+        <p:spPr>
+          <a:xfrm>
+            <a:off x="7207831" y="4480559"/>
+            <a:ext cx="128016" cy="0"/>
+          </a:xfrm>
+          <a:prstGeom prst="line">
+            <a:avLst/>
+          </a:prstGeom>
+          <a:ln w="25400">
+            <a:solidFill>
+              <a:srgbClr val="006E96"/>
+            </a:solidFill>
+            <a:tailEnd type="triangle" w="med" len="med"/>
+          </a:ln>
+        </p:spPr>
+        <p:style>
+          <a:lnRef idx="2">
+            <a:schemeClr val="accent1"/>
+          </a:lnRef>
+          <a:fillRef idx="0">
+            <a:schemeClr val="accent1"/>
+          </a:fillRef>
+          <a:effectRef idx="1">
+            <a:schemeClr val="accent1"/>
+          </a:effectRef>
+          <a:fontRef idx="minor">
+            <a:schemeClr val="tx1"/>
+          </a:fontRef>
+        </p:style>
+      </p:cxnSp>
+      <p:sp>
+        <p:nvSpPr>
+          <p:cNvPr id="10" name="Rounded Rectangle 9"/>
+          <p:cNvSpPr/>
+          <p:nvPr/>
+        </p:nvSpPr>
+        <p:spPr>
+          <a:xfrm>
+            <a:off x="9752616" y="3589020"/>
+            <a:ext cx="1787111" cy="1303020"/>
+          </a:xfrm>
+          <a:prstGeom prst="roundRect">
+            <a:avLst>
+              <a:gd name="adj" fmla="val 8000"/>
+            </a:avLst>
+          </a:prstGeom>
+          <a:solidFill>
+            <a:srgbClr val="E5F5FB"/>
+          </a:solidFill>
+          <a:ln>
+            <a:noFill/>
+          </a:ln>
+          <a:effectLst/>
+        </p:spPr>
+        <p:style>
+          <a:lnRef idx="1">
+            <a:schemeClr val="accent1"/>
+          </a:lnRef>
+          <a:fillRef idx="3">
+            <a:schemeClr val="accent1"/>
+          </a:fillRef>
+          <a:effectRef idx="2">
+            <a:schemeClr val="accent1"/>
+          </a:effectRef>
+          <a:fontRef idx="minor">
+            <a:schemeClr val="lt1"/>
+          </a:fontRef>
+        </p:style>
+        <p:txBody>
+          <a:bodyPr rtlCol="0" anchor="t" lIns="128016" rIns="128016" tIns="91440" bIns="54864" wrap="square"/>
+          <a:lstStyle/>
+          <a:p>
+            <a:pPr algn="l">
+              <a:spcAft>
+                <a:spcPts val="300"/>
+              </a:spcAft>
+            </a:pPr>
+            <a:r>
+              <a:rPr sz="1300" b="1" i="0">
+                <a:solidFill>
+                  <a:srgbClr val="006E96"/>
+                </a:solidFill>
+                <a:latin typeface="Arial"/>
+              </a:rPr>
+              <a:t>WAVE 4 — social protection</a:t>
+            </a:r>
+          </a:p>
+          <a:p>
+            <a:pPr algn="l">
+              <a:spcAft>
+                <a:spcPts val="300"/>
+              </a:spcAft>
+            </a:pPr>
+            <a:r>
+              <a:rPr sz="1150" b="0" i="0">
+                <a:solidFill>
+                  <a:srgbClr val="1A1A1A"/>
+                </a:solidFill>
+                <a:latin typeface="Arial"/>
+              </a:rPr>
+              <a:t>Easier still</a:t>
+            </a:r>
+          </a:p>
+        </p:txBody>
+      </p:sp>
+      <p:cxnSp>
+        <p:nvCxnSpPr>
+          <p:cNvPr id="11" name="Connector 10"/>
+          <p:cNvCxnSpPr/>
+          <p:nvPr/>
+        </p:nvCxnSpPr>
+        <p:spPr>
+          <a:xfrm>
+            <a:off x="9606312" y="4480559"/>
+            <a:ext cx="128016" cy="0"/>
+          </a:xfrm>
+          <a:prstGeom prst="line">
+            <a:avLst/>
+          </a:prstGeom>
+          <a:ln w="25400">
+            <a:solidFill>
+              <a:srgbClr val="006E96"/>
+            </a:solidFill>
+            <a:tailEnd type="triangle" w="med" len="med"/>
+          </a:ln>
+        </p:spPr>
+        <p:style>
+          <a:lnRef idx="2">
+            <a:schemeClr val="accent1"/>
+          </a:lnRef>
+          <a:fillRef idx="0">
+            <a:schemeClr val="accent1"/>
+          </a:fillRef>
+          <a:effectRef idx="1">
+            <a:schemeClr val="accent1"/>
+          </a:effectRef>
+          <a:fontRef idx="minor">
+            <a:schemeClr val="tx1"/>
+          </a:fontRef>
+        </p:style>
+      </p:cxnSp>
+      <p:sp>
+        <p:nvSpPr>
+          <p:cNvPr id="12" name="Rectangle 11"/>
+          <p:cNvSpPr/>
+          <p:nvPr/>
+        </p:nvSpPr>
+        <p:spPr>
+          <a:xfrm>
+            <a:off x="658368" y="5248656"/>
+            <a:ext cx="3738814" cy="182880"/>
+          </a:xfrm>
+          <a:prstGeom prst="rect">
+            <a:avLst/>
+          </a:prstGeom>
+          <a:solidFill>
+            <a:srgbClr val="006E96"/>
+          </a:solidFill>
+          <a:ln>
+            <a:noFill/>
+          </a:ln>
+          <a:effectLst/>
+        </p:spPr>
+        <p:style>
+          <a:lnRef idx="1">
+            <a:schemeClr val="accent1"/>
+          </a:lnRef>
+          <a:fillRef idx="3">
+            <a:schemeClr val="accent1"/>
+          </a:fillRef>
+          <a:effectRef idx="2">
+            <a:schemeClr val="accent1"/>
+          </a:effectRef>
+          <a:fontRef idx="minor">
+            <a:schemeClr val="lt1"/>
+          </a:fontRef>
+        </p:style>
+        <p:txBody>
           <a:bodyPr rtlCol="0" anchor="ctr"/>
           <a:lstStyle/>
           <a:p>
@@ -25549,14 +26945,146 @@
       </p:sp>
       <p:sp>
         <p:nvSpPr>
-          <p:cNvPr id="6" name="TextBox 5"/>
+          <p:cNvPr id="13" name="Rectangle 12"/>
+          <p:cNvSpPr/>
+          <p:nvPr/>
+        </p:nvSpPr>
+        <p:spPr>
+          <a:xfrm>
+            <a:off x="4397182" y="5175504"/>
+            <a:ext cx="2956953" cy="256032"/>
+          </a:xfrm>
+          <a:prstGeom prst="rect">
+            <a:avLst/>
+          </a:prstGeom>
+          <a:solidFill>
+            <a:srgbClr val="009CD6"/>
+          </a:solidFill>
+          <a:ln>
+            <a:noFill/>
+          </a:ln>
+          <a:effectLst/>
+        </p:spPr>
+        <p:style>
+          <a:lnRef idx="1">
+            <a:schemeClr val="accent1"/>
+          </a:lnRef>
+          <a:fillRef idx="3">
+            <a:schemeClr val="accent1"/>
+          </a:fillRef>
+          <a:effectRef idx="2">
+            <a:schemeClr val="accent1"/>
+          </a:effectRef>
+          <a:fontRef idx="minor">
+            <a:schemeClr val="lt1"/>
+          </a:fontRef>
+        </p:style>
+        <p:txBody>
+          <a:bodyPr rtlCol="0" anchor="ctr"/>
+          <a:lstStyle/>
+          <a:p>
+            <a:pPr algn="ctr"/>
+          </a:p>
+        </p:txBody>
+      </p:sp>
+      <p:sp>
+        <p:nvSpPr>
+          <p:cNvPr id="14" name="Rectangle 13"/>
+          <p:cNvSpPr/>
+          <p:nvPr/>
+        </p:nvSpPr>
+        <p:spPr>
+          <a:xfrm>
+            <a:off x="7354135" y="5102352"/>
+            <a:ext cx="2398481" cy="329184"/>
+          </a:xfrm>
+          <a:prstGeom prst="rect">
+            <a:avLst/>
+          </a:prstGeom>
+          <a:solidFill>
+            <a:srgbClr val="009CD6"/>
+          </a:solidFill>
+          <a:ln>
+            <a:noFill/>
+          </a:ln>
+          <a:effectLst/>
+        </p:spPr>
+        <p:style>
+          <a:lnRef idx="1">
+            <a:schemeClr val="accent1"/>
+          </a:lnRef>
+          <a:fillRef idx="3">
+            <a:schemeClr val="accent1"/>
+          </a:fillRef>
+          <a:effectRef idx="2">
+            <a:schemeClr val="accent1"/>
+          </a:effectRef>
+          <a:fontRef idx="minor">
+            <a:schemeClr val="lt1"/>
+          </a:fontRef>
+        </p:style>
+        <p:txBody>
+          <a:bodyPr rtlCol="0" anchor="ctr"/>
+          <a:lstStyle/>
+          <a:p>
+            <a:pPr algn="ctr"/>
+          </a:p>
+        </p:txBody>
+      </p:sp>
+      <p:sp>
+        <p:nvSpPr>
+          <p:cNvPr id="15" name="Rectangle 14"/>
+          <p:cNvSpPr/>
+          <p:nvPr/>
+        </p:nvSpPr>
+        <p:spPr>
+          <a:xfrm>
+            <a:off x="9752616" y="5029200"/>
+            <a:ext cx="1787111" cy="402336"/>
+          </a:xfrm>
+          <a:prstGeom prst="rect">
+            <a:avLst/>
+          </a:prstGeom>
+          <a:solidFill>
+            <a:srgbClr val="009CD6"/>
+          </a:solidFill>
+          <a:ln>
+            <a:noFill/>
+          </a:ln>
+          <a:effectLst/>
+        </p:spPr>
+        <p:style>
+          <a:lnRef idx="1">
+            <a:schemeClr val="accent1"/>
+          </a:lnRef>
+          <a:fillRef idx="3">
+            <a:schemeClr val="accent1"/>
+          </a:fillRef>
+          <a:effectRef idx="2">
+            <a:schemeClr val="accent1"/>
+          </a:effectRef>
+          <a:fontRef idx="minor">
+            <a:schemeClr val="lt1"/>
+          </a:fontRef>
+        </p:style>
+        <p:txBody>
+          <a:bodyPr rtlCol="0" anchor="ctr"/>
+          <a:lstStyle/>
+          <a:p>
+            <a:pPr algn="ctr"/>
+          </a:p>
+        </p:txBody>
+      </p:sp>
+      <p:sp>
+        <p:nvSpPr>
+          <p:cNvPr id="16" name="TextBox 15"/>
           <p:cNvSpPr txBox="1"/>
           <p:nvPr/>
         </p:nvSpPr>
         <p:spPr>
           <a:xfrm>
-            <a:off x="859536" y="4626864"/>
-            <a:ext cx="10479024" cy="1051560"/>
+            <a:off x="658368" y="5486400"/>
+            <a:ext cx="10881360" cy="320040"/>
           </a:xfrm>
           <a:prstGeom prst="rect">
             <a:avLst/>
@@ -25569,18 +27097,47 @@
           </a:bodyPr>
           <a:lstStyle/>
           <a:p>
-            <a:pPr>
-              <a:spcAft>
-                <a:spcPts val="700"/>
-              </a:spcAft>
-            </a:pPr>
-            <a:r>
-              <a:rPr sz="2300" b="1" i="0">
+            <a:r>
+              <a:rPr sz="1150" b="1" i="0">
                 <a:solidFill>
                   <a:srgbClr val="006E96"/>
                 </a:solidFill>
                 <a:latin typeface="Arial"/>
               </a:rPr>
+              <a:t>Shared platforms — more complete with every wave</a:t>
+            </a:r>
+          </a:p>
+        </p:txBody>
+      </p:sp>
+      <p:sp>
+        <p:nvSpPr>
+          <p:cNvPr id="17" name="TextBox 16"/>
+          <p:cNvSpPr txBox="1"/>
+          <p:nvPr/>
+        </p:nvSpPr>
+        <p:spPr>
+          <a:xfrm>
+            <a:off x="658368" y="5806440"/>
+            <a:ext cx="10881360" cy="548640"/>
+          </a:xfrm>
+          <a:prstGeom prst="rect">
+            <a:avLst/>
+          </a:prstGeom>
+          <a:noFill/>
+        </p:spPr>
+        <p:txBody>
+          <a:bodyPr wrap="square">
+            <a:spAutoFit/>
+          </a:bodyPr>
+          <a:lstStyle/>
+          <a:p>
+            <a:r>
+              <a:rPr sz="1550" b="1" i="0">
+                <a:solidFill>
+                  <a:srgbClr val="006E96"/>
+                </a:solidFill>
+                <a:latin typeface="Arial"/>
+              </a:rPr>
               <a:t>The opposite of a programme that gets harder under its own weight.</a:t>
             </a:r>
           </a:p>
@@ -25588,7 +27145,7 @@
       </p:sp>
       <p:sp>
         <p:nvSpPr>
-          <p:cNvPr id="7" name="TextBox 6"/>
+          <p:cNvPr id="18" name="TextBox 17"/>
           <p:cNvSpPr txBox="1"/>
           <p:nvPr/>
         </p:nvSpPr>
